--- a/public/fun/pack/pptx/familypro/가족소개프리미엄_06_우리부부_민트플래티넘.pptx
+++ b/public/fun/pack/pptx/familypro/가족소개프리미엄_06_우리부부_민트플래티넘.pptx
@@ -113,12 +113,12 @@
   <p:extLst>
     <p:ext uri="{521415D9-36F7-43E2-AB2F-B90AF26B5E84}">
       <p14:sectionLst xmlns:p14="http://schemas.microsoft.com/office/powerpoint/2010/main">
-        <p14:section name="시작" id="{724EF398-7513-43DB-ABF5-7268AFB5DFC7}">
+        <p14:section name="시작" id="{5E2E30FC-9F28-4BB2-BDE5-FBED4ABBA432}">
           <p14:sldIdLst>
             <p14:sldId id="256"/>
           </p14:sldIdLst>
         </p14:section>
-        <p14:section name="본문" id="{7A413FD4-5C50-4C74-B34F-F3013E2D9E65}">
+        <p14:section name="본문" id="{FEB51DC9-0A74-48AD-AA7F-9F70404B03D8}">
           <p14:sldIdLst>
             <p14:sldId id="257"/>
             <p14:sldId id="258"/>
@@ -127,7 +127,7 @@
             <p14:sldId id="261"/>
           </p14:sldIdLst>
         </p14:section>
-        <p14:section name="마무리" id="{522BD0F0-A251-4DEF-B03B-DE6ADA0C720D}">
+        <p14:section name="마무리" id="{C4060D8F-BB3E-4705-B85D-309B08B63F17}">
           <p14:sldIdLst>
             <p14:sldId id="262"/>
           </p14:sldIdLst>
@@ -1471,7 +1471,7 @@
             </a:lvl1pPr>
           </a:lstStyle>
           <a:p>
-            <a:fld id="{7A22A9D2-D396-4CC7-AFFD-9D333DFD9514}" type="slidenum">
+            <a:fld id="{76852583-B6DC-476C-A3EC-28205B6CEBCC}" type="slidenum">
               <a:rPr lang="en-US"/>
               <a:t>‹#›</a:t>
             </a:fld>
@@ -2144,7 +2144,7 @@
             </a:lvl1pPr>
           </a:lstStyle>
           <a:p>
-            <a:fld id="{E148508F-1EB1-4744-AFCE-8B20EDA5C015}" type="slidenum">
+            <a:fld id="{201A7ED2-5EF9-4D97-8DB6-4174A1666AE7}" type="slidenum">
               <a:rPr lang="en-US"/>
               <a:t>‹#›</a:t>
             </a:fld>
@@ -2824,7 +2824,7 @@
             </a:lvl1pPr>
           </a:lstStyle>
           <a:p>
-            <a:fld id="{325C1D6F-828C-4073-A33E-5B278F008931}" type="slidenum">
+            <a:fld id="{CCDF0504-7179-4DB0-BA9D-87B9C50A2A22}" type="slidenum">
               <a:rPr lang="en-US"/>
               <a:t>‹#›</a:t>
             </a:fld>
@@ -3713,7 +3713,7 @@
           <a:p>
             <a:r>
               <a:rPr lang="ko-KR"/>
-              <a:t>봄비 오는 창가에서 차 한 잔</a:t>
+              <a:t>우산 세워 둔 창가에서 차 한 잔</a:t>
             </a:r>
           </a:p>
         </p:txBody>
@@ -3735,7 +3735,7 @@
           <a:p>
             <a:r>
               <a:rPr lang="ko-KR"/>
-              <a:t>우리 부부 · 0000. 00. 00</a:t>
+              <a:t>우리 부부 · 날짜 입력</a:t>
             </a:r>
           </a:p>
         </p:txBody>
@@ -3958,7 +3958,7 @@
           <a:bodyPr/>
           <a:lstStyle/>
           <a:p>
-            <a:fld id="{9FF6A625-7D61-4BC5-9568-2B60F310C14F}" type="slidenum">
+            <a:fld id="{E4188E2C-9E9F-4708-A6C0-B22EC147124C}" type="slidenum">
               <a:rPr lang="en-US"/>
               <a:t>‹#›</a:t>
             </a:fld>
@@ -4410,7 +4410,7 @@
           <a:bodyPr/>
           <a:lstStyle/>
           <a:p>
-            <a:fld id="{A6E84F13-A70B-4A7B-ABC0-E32957E2E745}" type="slidenum">
+            <a:fld id="{5B3AE3DE-753B-4169-B48F-0676C7B6283F}" type="slidenum">
               <a:rPr lang="en-US"/>
               <a:t>‹#›</a:t>
             </a:fld>
@@ -5385,7 +5385,7 @@
           <a:bodyPr/>
           <a:lstStyle/>
           <a:p>
-            <a:fld id="{E9B670BF-D4AF-4213-B0F8-75C8A9632A89}" type="slidenum">
+            <a:fld id="{39D8CAD7-1380-4B20-B889-53EACF3B0F89}" type="slidenum">
               <a:rPr lang="en-US"/>
               <a:t>‹#›</a:t>
             </a:fld>
@@ -6736,7 +6736,7 @@
           <a:bodyPr/>
           <a:lstStyle/>
           <a:p>
-            <a:fld id="{4EE5591C-EE21-4139-AD6F-949EB2E12902}" type="slidenum">
+            <a:fld id="{2E7C49F2-9F16-48FA-887D-FB8E084EB11E}" type="slidenum">
               <a:rPr lang="en-US"/>
               <a:t>‹#›</a:t>
             </a:fld>
@@ -6824,7 +6824,7 @@
           <a:bodyPr/>
           <a:lstStyle/>
           <a:p>
-            <a:fld id="{C5B82CF5-55D9-41B0-82A4-1796C6EA96FA}" type="slidenum">
+            <a:fld id="{39A2B9DE-D9FB-4950-9756-F7D2680B87C6}" type="slidenum">
               <a:rPr lang="en-US"/>
               <a:t>‹#›</a:t>
             </a:fld>
